--- a/eval/out/q3_visuals.pptx
+++ b/eval/out/q3_visuals.pptx
@@ -3106,8 +3106,8 @@
         </p:nvSpPr>
         <p:spPr>
           <a:xfrm>
-            <a:off x="411480" y="511423"/>
-            <a:ext cx="11369040" cy="303033"/>
+            <a:off x="411480" y="274320"/>
+            <a:ext cx="11369040" cy="310608"/>
           </a:xfrm>
           <a:prstGeom prst="rect">
             <a:avLst/>
@@ -3122,7 +3122,7 @@
           <a:p>
             <a:pPr algn="l">
               <a:lnSpc>
-                <a:spcPts val="2386"/>
+                <a:spcPts val="2445"/>
               </a:lnSpc>
               <a:spcBef>
                 <a:spcPts val="0"/>
@@ -3259,8 +3259,8 @@
         </p:nvSpPr>
         <p:spPr>
           <a:xfrm>
-            <a:off x="411480" y="6193210"/>
-            <a:ext cx="11369040" cy="143582"/>
+            <a:off x="411480" y="6189621"/>
+            <a:ext cx="11369040" cy="147171"/>
           </a:xfrm>
           <a:prstGeom prst="rect">
             <a:avLst/>
@@ -3275,7 +3275,7 @@
           <a:p>
             <a:pPr algn="l">
               <a:lnSpc>
-                <a:spcPts val="1130"/>
+                <a:spcPts val="1158"/>
               </a:lnSpc>
               <a:spcBef>
                 <a:spcPts val="0"/>
@@ -3392,7 +3392,7 @@
         <p:spPr>
           <a:xfrm>
             <a:off x="411480" y="5477256"/>
-            <a:ext cx="5196108" cy="168920"/>
+            <a:ext cx="5196108" cy="173143"/>
           </a:xfrm>
           <a:prstGeom prst="rect">
             <a:avLst/>
@@ -3407,7 +3407,7 @@
           <a:p>
             <a:pPr algn="ctr">
               <a:lnSpc>
-                <a:spcPts val="1330"/>
+                <a:spcPts val="1363"/>
               </a:lnSpc>
               <a:spcBef>
                 <a:spcPts val="0"/>
@@ -3482,7 +3482,7 @@
         <p:spPr>
           <a:xfrm>
             <a:off x="5680740" y="1051560"/>
-            <a:ext cx="6099780" cy="244934"/>
+            <a:ext cx="6099780" cy="251057"/>
           </a:xfrm>
           <a:prstGeom prst="rect">
             <a:avLst/>
@@ -3497,7 +3497,7 @@
           <a:p>
             <a:pPr algn="l">
               <a:lnSpc>
-                <a:spcPts val="1928"/>
+                <a:spcPts val="1976"/>
               </a:lnSpc>
               <a:spcBef>
                 <a:spcPts val="0"/>
@@ -3571,8 +3571,8 @@
         </p:nvSpPr>
         <p:spPr>
           <a:xfrm>
-            <a:off x="5680740" y="1406222"/>
-            <a:ext cx="109728" cy="168920"/>
+            <a:off x="5680740" y="1412345"/>
+            <a:ext cx="109728" cy="173143"/>
           </a:xfrm>
           <a:prstGeom prst="rect">
             <a:avLst/>
@@ -3587,7 +3587,7 @@
           <a:p>
             <a:pPr algn="l">
               <a:lnSpc>
-                <a:spcPts val="1330"/>
+                <a:spcPts val="1363"/>
               </a:lnSpc>
               <a:spcBef>
                 <a:spcPts val="0"/>
@@ -3616,8 +3616,8 @@
         </p:nvSpPr>
         <p:spPr>
           <a:xfrm>
-            <a:off x="5790468" y="1406222"/>
-            <a:ext cx="5990052" cy="168920"/>
+            <a:off x="5790468" y="1412345"/>
+            <a:ext cx="5990052" cy="173143"/>
           </a:xfrm>
           <a:prstGeom prst="rect">
             <a:avLst/>
@@ -3632,7 +3632,7 @@
           <a:p>
             <a:pPr algn="l">
               <a:lnSpc>
-                <a:spcPts val="1330"/>
+                <a:spcPts val="1363"/>
               </a:lnSpc>
               <a:spcBef>
                 <a:spcPts val="0"/>
@@ -3733,8 +3733,8 @@
         </p:nvSpPr>
         <p:spPr>
           <a:xfrm>
-            <a:off x="5680740" y="1607146"/>
-            <a:ext cx="109728" cy="168920"/>
+            <a:off x="5680740" y="1617492"/>
+            <a:ext cx="109728" cy="173143"/>
           </a:xfrm>
           <a:prstGeom prst="rect">
             <a:avLst/>
@@ -3749,7 +3749,7 @@
           <a:p>
             <a:pPr algn="l">
               <a:lnSpc>
-                <a:spcPts val="1330"/>
+                <a:spcPts val="1363"/>
               </a:lnSpc>
               <a:spcBef>
                 <a:spcPts val="0"/>
@@ -3778,8 +3778,8 @@
         </p:nvSpPr>
         <p:spPr>
           <a:xfrm>
-            <a:off x="5790468" y="1607146"/>
-            <a:ext cx="5990052" cy="168920"/>
+            <a:off x="5790468" y="1617492"/>
+            <a:ext cx="5990052" cy="173143"/>
           </a:xfrm>
           <a:prstGeom prst="rect">
             <a:avLst/>
@@ -3794,7 +3794,7 @@
           <a:p>
             <a:pPr algn="l">
               <a:lnSpc>
-                <a:spcPts val="1330"/>
+                <a:spcPts val="1363"/>
               </a:lnSpc>
               <a:spcBef>
                 <a:spcPts val="0"/>
@@ -3922,8 +3922,8 @@
         </p:nvSpPr>
         <p:spPr>
           <a:xfrm>
-            <a:off x="5680740" y="1808070"/>
-            <a:ext cx="109728" cy="168920"/>
+            <a:off x="5680740" y="1822639"/>
+            <a:ext cx="109728" cy="173143"/>
           </a:xfrm>
           <a:prstGeom prst="rect">
             <a:avLst/>
@@ -3938,7 +3938,7 @@
           <a:p>
             <a:pPr algn="l">
               <a:lnSpc>
-                <a:spcPts val="1330"/>
+                <a:spcPts val="1363"/>
               </a:lnSpc>
               <a:spcBef>
                 <a:spcPts val="0"/>
@@ -3967,8 +3967,8 @@
         </p:nvSpPr>
         <p:spPr>
           <a:xfrm>
-            <a:off x="5790468" y="1808070"/>
-            <a:ext cx="5990052" cy="168920"/>
+            <a:off x="5790468" y="1822639"/>
+            <a:ext cx="5990052" cy="173143"/>
           </a:xfrm>
           <a:prstGeom prst="rect">
             <a:avLst/>
@@ -3983,7 +3983,7 @@
           <a:p>
             <a:pPr algn="l">
               <a:lnSpc>
-                <a:spcPts val="1330"/>
+                <a:spcPts val="1363"/>
               </a:lnSpc>
               <a:spcBef>
                 <a:spcPts val="0"/>
@@ -4084,8 +4084,8 @@
         </p:nvSpPr>
         <p:spPr>
           <a:xfrm>
-            <a:off x="5680740" y="2086718"/>
-            <a:ext cx="2033260" cy="168920"/>
+            <a:off x="5680740" y="2105510"/>
+            <a:ext cx="2033260" cy="173143"/>
           </a:xfrm>
           <a:prstGeom prst="rect">
             <a:avLst/>
@@ -4100,7 +4100,7 @@
           <a:p>
             <a:pPr algn="ctr">
               <a:lnSpc>
-                <a:spcPts val="1330"/>
+                <a:spcPts val="1363"/>
               </a:lnSpc>
               <a:spcBef>
                 <a:spcPts val="0"/>
@@ -4129,8 +4129,8 @@
         </p:nvSpPr>
         <p:spPr>
           <a:xfrm>
-            <a:off x="5680740" y="2278498"/>
-            <a:ext cx="2033260" cy="253380"/>
+            <a:off x="5680740" y="2301513"/>
+            <a:ext cx="2033260" cy="259714"/>
           </a:xfrm>
           <a:prstGeom prst="rect">
             <a:avLst/>
@@ -4145,7 +4145,7 @@
           <a:p>
             <a:pPr algn="ctr">
               <a:lnSpc>
-                <a:spcPts val="1995"/>
+                <a:spcPts val="2044"/>
               </a:lnSpc>
               <a:spcBef>
                 <a:spcPts val="0"/>
@@ -4174,7 +4174,7 @@
         </p:nvCxnSpPr>
         <p:spPr>
           <a:xfrm>
-            <a:off x="6087392" y="2551944"/>
+            <a:off x="6087392" y="2581293"/>
             <a:ext cx="1219956" cy="0"/>
           </a:xfrm>
           <a:prstGeom prst="line">
@@ -4209,8 +4209,8 @@
         </p:nvSpPr>
         <p:spPr>
           <a:xfrm>
-            <a:off x="7714000" y="2086718"/>
-            <a:ext cx="2033260" cy="168920"/>
+            <a:off x="7714000" y="2105510"/>
+            <a:ext cx="2033260" cy="173143"/>
           </a:xfrm>
           <a:prstGeom prst="rect">
             <a:avLst/>
@@ -4225,7 +4225,7 @@
           <a:p>
             <a:pPr algn="ctr">
               <a:lnSpc>
-                <a:spcPts val="1330"/>
+                <a:spcPts val="1363"/>
               </a:lnSpc>
               <a:spcBef>
                 <a:spcPts val="0"/>
@@ -4254,8 +4254,8 @@
         </p:nvSpPr>
         <p:spPr>
           <a:xfrm>
-            <a:off x="7714000" y="2278498"/>
-            <a:ext cx="2033260" cy="253380"/>
+            <a:off x="7714000" y="2301513"/>
+            <a:ext cx="2033260" cy="259714"/>
           </a:xfrm>
           <a:prstGeom prst="rect">
             <a:avLst/>
@@ -4270,7 +4270,7 @@
           <a:p>
             <a:pPr algn="ctr">
               <a:lnSpc>
-                <a:spcPts val="1995"/>
+                <a:spcPts val="2044"/>
               </a:lnSpc>
               <a:spcBef>
                 <a:spcPts val="0"/>
@@ -4299,7 +4299,7 @@
         </p:nvCxnSpPr>
         <p:spPr>
           <a:xfrm>
-            <a:off x="8120652" y="2551944"/>
+            <a:off x="8120652" y="2581293"/>
             <a:ext cx="1219956" cy="0"/>
           </a:xfrm>
           <a:prstGeom prst="line">
@@ -4334,8 +4334,8 @@
         </p:nvSpPr>
         <p:spPr>
           <a:xfrm>
-            <a:off x="9747260" y="2086718"/>
-            <a:ext cx="2033260" cy="168920"/>
+            <a:off x="9747260" y="2105510"/>
+            <a:ext cx="2033260" cy="173143"/>
           </a:xfrm>
           <a:prstGeom prst="rect">
             <a:avLst/>
@@ -4350,7 +4350,7 @@
           <a:p>
             <a:pPr algn="ctr">
               <a:lnSpc>
-                <a:spcPts val="1330"/>
+                <a:spcPts val="1363"/>
               </a:lnSpc>
               <a:spcBef>
                 <a:spcPts val="0"/>
@@ -4379,8 +4379,8 @@
         </p:nvSpPr>
         <p:spPr>
           <a:xfrm>
-            <a:off x="9747260" y="2278498"/>
-            <a:ext cx="2033260" cy="253380"/>
+            <a:off x="9747260" y="2301513"/>
+            <a:ext cx="2033260" cy="259714"/>
           </a:xfrm>
           <a:prstGeom prst="rect">
             <a:avLst/>
@@ -4395,7 +4395,7 @@
           <a:p>
             <a:pPr algn="ctr">
               <a:lnSpc>
-                <a:spcPts val="1995"/>
+                <a:spcPts val="2044"/>
               </a:lnSpc>
               <a:spcBef>
                 <a:spcPts val="0"/>
@@ -4424,7 +4424,7 @@
         </p:nvCxnSpPr>
         <p:spPr>
           <a:xfrm>
-            <a:off x="10153912" y="2551944"/>
+            <a:off x="10153912" y="2581293"/>
             <a:ext cx="1219956" cy="0"/>
           </a:xfrm>
           <a:prstGeom prst="line">
@@ -4459,7 +4459,7 @@
         </p:nvSpPr>
         <p:spPr>
           <a:xfrm>
-            <a:off x="5680740" y="5315386"/>
+            <a:off x="5680740" y="5311797"/>
             <a:ext cx="6099780" cy="822960"/>
           </a:xfrm>
           <a:prstGeom prst="rect">
@@ -4505,7 +4505,7 @@
         </p:nvSpPr>
         <p:spPr>
           <a:xfrm>
-            <a:off x="5772180" y="5315386"/>
+            <a:off x="5772180" y="5311797"/>
             <a:ext cx="5916900" cy="822960"/>
           </a:xfrm>
           <a:prstGeom prst="rect">
@@ -4521,7 +4521,7 @@
           <a:p>
             <a:pPr algn="ctr">
               <a:lnSpc>
-                <a:spcPts val="1330"/>
+                <a:spcPts val="1363"/>
               </a:lnSpc>
               <a:spcBef>
                 <a:spcPts val="0"/>
@@ -4740,8 +4740,8 @@
         </p:nvSpPr>
         <p:spPr>
           <a:xfrm>
-            <a:off x="411480" y="511423"/>
-            <a:ext cx="11369040" cy="303033"/>
+            <a:off x="411480" y="274320"/>
+            <a:ext cx="11369040" cy="310608"/>
           </a:xfrm>
           <a:prstGeom prst="rect">
             <a:avLst/>
@@ -4756,7 +4756,7 @@
           <a:p>
             <a:pPr algn="l">
               <a:lnSpc>
-                <a:spcPts val="2386"/>
+                <a:spcPts val="2445"/>
               </a:lnSpc>
               <a:spcBef>
                 <a:spcPts val="0"/>
@@ -4911,8 +4911,8 @@
         </p:nvSpPr>
         <p:spPr>
           <a:xfrm>
-            <a:off x="411480" y="6193210"/>
-            <a:ext cx="11369040" cy="143582"/>
+            <a:off x="411480" y="6189621"/>
+            <a:ext cx="11369040" cy="147171"/>
           </a:xfrm>
           <a:prstGeom prst="rect">
             <a:avLst/>
@@ -4927,7 +4927,7 @@
           <a:p>
             <a:pPr algn="l">
               <a:lnSpc>
-                <a:spcPts val="1130"/>
+                <a:spcPts val="1158"/>
               </a:lnSpc>
               <a:spcBef>
                 <a:spcPts val="0"/>
@@ -5091,7 +5091,7 @@
           <a:p>
             <a:pPr algn="ctr">
               <a:lnSpc>
-                <a:spcPts val="1330"/>
+                <a:spcPts val="1363"/>
               </a:lnSpc>
               <a:spcBef>
                 <a:spcPts val="0"/>
@@ -5243,7 +5243,7 @@
           <a:p>
             <a:pPr algn="ctr">
               <a:lnSpc>
-                <a:spcPts val="1330"/>
+                <a:spcPts val="1363"/>
               </a:lnSpc>
               <a:spcBef>
                 <a:spcPts val="0"/>
@@ -5395,7 +5395,7 @@
           <a:p>
             <a:pPr algn="ctr">
               <a:lnSpc>
-                <a:spcPts val="1330"/>
+                <a:spcPts val="1363"/>
               </a:lnSpc>
               <a:spcBef>
                 <a:spcPts val="0"/>
@@ -5547,7 +5547,7 @@
           <a:p>
             <a:pPr algn="ctr">
               <a:lnSpc>
-                <a:spcPts val="1330"/>
+                <a:spcPts val="1363"/>
               </a:lnSpc>
               <a:spcBef>
                 <a:spcPts val="0"/>
@@ -5627,8 +5627,8 @@
         </p:nvSpPr>
         <p:spPr>
           <a:xfrm>
-            <a:off x="411480" y="4839556"/>
-            <a:ext cx="11369040" cy="1298790"/>
+            <a:off x="411480" y="4836900"/>
+            <a:ext cx="11369040" cy="1297857"/>
           </a:xfrm>
           <a:prstGeom prst="rect">
             <a:avLst/>
@@ -5673,8 +5673,8 @@
         </p:nvSpPr>
         <p:spPr>
           <a:xfrm>
-            <a:off x="484632" y="4912708"/>
-            <a:ext cx="11222736" cy="168920"/>
+            <a:off x="484632" y="4910052"/>
+            <a:ext cx="11222736" cy="173143"/>
           </a:xfrm>
           <a:prstGeom prst="rect">
             <a:avLst/>
@@ -5689,7 +5689,7 @@
           <a:p>
             <a:pPr algn="l">
               <a:lnSpc>
-                <a:spcPts val="1330"/>
+                <a:spcPts val="1363"/>
               </a:lnSpc>
               <a:spcBef>
                 <a:spcPts val="0"/>
@@ -5808,7 +5808,7 @@
         </p:nvSpPr>
         <p:spPr>
           <a:xfrm>
-            <a:off x="484632" y="5173068"/>
+            <a:off x="484632" y="5174635"/>
             <a:ext cx="292608" cy="292608"/>
           </a:xfrm>
           <a:prstGeom prst="pie">
@@ -5855,7 +5855,7 @@
         </p:nvSpPr>
         <p:spPr>
           <a:xfrm>
-            <a:off x="484632" y="5173068"/>
+            <a:off x="484632" y="5174635"/>
             <a:ext cx="292608" cy="292608"/>
           </a:xfrm>
           <a:prstGeom prst="ellipse">
@@ -5899,7 +5899,7 @@
         </p:nvSpPr>
         <p:spPr>
           <a:xfrm>
-            <a:off x="850392" y="5173068"/>
+            <a:off x="850392" y="5174635"/>
             <a:ext cx="2405634" cy="292608"/>
           </a:xfrm>
           <a:prstGeom prst="rect">
@@ -5915,7 +5915,7 @@
           <a:p>
             <a:pPr algn="l">
               <a:lnSpc>
-                <a:spcPts val="1330"/>
+                <a:spcPts val="1363"/>
               </a:lnSpc>
               <a:spcBef>
                 <a:spcPts val="0"/>
@@ -5953,7 +5953,7 @@
         </p:nvSpPr>
         <p:spPr>
           <a:xfrm>
-            <a:off x="3301746" y="5173068"/>
+            <a:off x="3301746" y="5174635"/>
             <a:ext cx="292608" cy="292608"/>
           </a:xfrm>
           <a:prstGeom prst="ellipse">
@@ -5997,7 +5997,7 @@
         </p:nvSpPr>
         <p:spPr>
           <a:xfrm>
-            <a:off x="3301746" y="5173068"/>
+            <a:off x="3301746" y="5174635"/>
             <a:ext cx="292608" cy="292608"/>
           </a:xfrm>
           <a:prstGeom prst="ellipse">
@@ -6041,7 +6041,7 @@
         </p:nvSpPr>
         <p:spPr>
           <a:xfrm>
-            <a:off x="3667506" y="5173068"/>
+            <a:off x="3667506" y="5174635"/>
             <a:ext cx="2405634" cy="292608"/>
           </a:xfrm>
           <a:prstGeom prst="rect">
@@ -6057,7 +6057,7 @@
           <a:p>
             <a:pPr algn="l">
               <a:lnSpc>
-                <a:spcPts val="1330"/>
+                <a:spcPts val="1363"/>
               </a:lnSpc>
               <a:spcBef>
                 <a:spcPts val="0"/>
@@ -6095,7 +6095,7 @@
         </p:nvSpPr>
         <p:spPr>
           <a:xfrm>
-            <a:off x="6118860" y="5173068"/>
+            <a:off x="6118860" y="5174635"/>
             <a:ext cx="292608" cy="292608"/>
           </a:xfrm>
           <a:prstGeom prst="pie">
@@ -6142,7 +6142,7 @@
         </p:nvSpPr>
         <p:spPr>
           <a:xfrm>
-            <a:off x="6118860" y="5173068"/>
+            <a:off x="6118860" y="5174635"/>
             <a:ext cx="292608" cy="292608"/>
           </a:xfrm>
           <a:prstGeom prst="ellipse">
@@ -6186,7 +6186,7 @@
         </p:nvSpPr>
         <p:spPr>
           <a:xfrm>
-            <a:off x="6484620" y="5173068"/>
+            <a:off x="6484620" y="5174635"/>
             <a:ext cx="2405634" cy="292608"/>
           </a:xfrm>
           <a:prstGeom prst="rect">
@@ -6202,7 +6202,7 @@
           <a:p>
             <a:pPr algn="l">
               <a:lnSpc>
-                <a:spcPts val="1330"/>
+                <a:spcPts val="1363"/>
               </a:lnSpc>
               <a:spcBef>
                 <a:spcPts val="0"/>
@@ -6240,7 +6240,7 @@
         </p:nvSpPr>
         <p:spPr>
           <a:xfrm>
-            <a:off x="8935974" y="5173068"/>
+            <a:off x="8935974" y="5174635"/>
             <a:ext cx="292608" cy="292608"/>
           </a:xfrm>
           <a:prstGeom prst="pie">
@@ -6287,7 +6287,7 @@
         </p:nvSpPr>
         <p:spPr>
           <a:xfrm>
-            <a:off x="8935974" y="5173068"/>
+            <a:off x="8935974" y="5174635"/>
             <a:ext cx="292608" cy="292608"/>
           </a:xfrm>
           <a:prstGeom prst="ellipse">
@@ -6331,7 +6331,7 @@
         </p:nvSpPr>
         <p:spPr>
           <a:xfrm>
-            <a:off x="9301734" y="5173068"/>
+            <a:off x="9301734" y="5174635"/>
             <a:ext cx="2405634" cy="292608"/>
           </a:xfrm>
           <a:prstGeom prst="rect">
@@ -6347,7 +6347,7 @@
           <a:p>
             <a:pPr algn="l">
               <a:lnSpc>
-                <a:spcPts val="1330"/>
+                <a:spcPts val="1363"/>
               </a:lnSpc>
               <a:spcBef>
                 <a:spcPts val="0"/>
@@ -6554,8 +6554,8 @@
         </p:nvSpPr>
         <p:spPr>
           <a:xfrm>
-            <a:off x="411480" y="511423"/>
-            <a:ext cx="11369040" cy="303033"/>
+            <a:off x="411480" y="274320"/>
+            <a:ext cx="11369040" cy="310608"/>
           </a:xfrm>
           <a:prstGeom prst="rect">
             <a:avLst/>
@@ -6570,7 +6570,7 @@
           <a:p>
             <a:pPr algn="l">
               <a:lnSpc>
-                <a:spcPts val="2386"/>
+                <a:spcPts val="2445"/>
               </a:lnSpc>
               <a:spcBef>
                 <a:spcPts val="0"/>
@@ -6671,8 +6671,8 @@
         </p:nvSpPr>
         <p:spPr>
           <a:xfrm>
-            <a:off x="411480" y="6193210"/>
-            <a:ext cx="11369040" cy="143582"/>
+            <a:off x="411480" y="6189621"/>
+            <a:ext cx="11369040" cy="147171"/>
           </a:xfrm>
           <a:prstGeom prst="rect">
             <a:avLst/>
@@ -6687,7 +6687,7 @@
           <a:p>
             <a:pPr algn="l">
               <a:lnSpc>
-                <a:spcPts val="1130"/>
+                <a:spcPts val="1158"/>
               </a:lnSpc>
               <a:spcBef>
                 <a:spcPts val="0"/>
@@ -6798,7 +6798,7 @@
         <p:spPr>
           <a:xfrm>
             <a:off x="704088" y="1051560"/>
-            <a:ext cx="5522214" cy="866308"/>
+            <a:ext cx="5522214" cy="883622"/>
           </a:xfrm>
           <a:prstGeom prst="rect">
             <a:avLst/>
@@ -6842,7 +6842,7 @@
         <p:spPr>
           <a:xfrm>
             <a:off x="758952" y="1106424"/>
-            <a:ext cx="5412486" cy="185812"/>
+            <a:ext cx="5412486" cy="190457"/>
           </a:xfrm>
           <a:prstGeom prst="rect">
             <a:avLst/>
@@ -6857,7 +6857,7 @@
           <a:p>
             <a:pPr algn="l">
               <a:lnSpc>
-                <a:spcPts val="1463"/>
+                <a:spcPts val="1499"/>
               </a:lnSpc>
               <a:spcBef>
                 <a:spcPts val="0"/>
@@ -6904,8 +6904,8 @@
         </p:nvSpPr>
         <p:spPr>
           <a:xfrm>
-            <a:off x="758952" y="1319668"/>
-            <a:ext cx="5412486" cy="168920"/>
+            <a:off x="758952" y="1324313"/>
+            <a:ext cx="5412486" cy="173143"/>
           </a:xfrm>
           <a:prstGeom prst="rect">
             <a:avLst/>
@@ -6920,7 +6920,7 @@
           <a:p>
             <a:pPr algn="l">
               <a:lnSpc>
-                <a:spcPts val="1330"/>
+                <a:spcPts val="1363"/>
               </a:lnSpc>
               <a:spcBef>
                 <a:spcPts val="0"/>
@@ -6985,8 +6985,8 @@
         </p:nvSpPr>
         <p:spPr>
           <a:xfrm>
-            <a:off x="758952" y="1506876"/>
-            <a:ext cx="5412486" cy="168920"/>
+            <a:off x="758952" y="1515744"/>
+            <a:ext cx="5412486" cy="173143"/>
           </a:xfrm>
           <a:prstGeom prst="rect">
             <a:avLst/>
@@ -7001,7 +7001,7 @@
           <a:p>
             <a:pPr algn="l">
               <a:lnSpc>
-                <a:spcPts val="1330"/>
+                <a:spcPts val="1363"/>
               </a:lnSpc>
               <a:spcBef>
                 <a:spcPts val="0"/>
@@ -7058,7 +7058,7 @@
         <p:spPr>
           <a:xfrm>
             <a:off x="6258306" y="1051560"/>
-            <a:ext cx="5522214" cy="866308"/>
+            <a:ext cx="5522214" cy="883622"/>
           </a:xfrm>
           <a:prstGeom prst="rect">
             <a:avLst/>
@@ -7104,7 +7104,7 @@
         <p:spPr>
           <a:xfrm>
             <a:off x="6313170" y="1106424"/>
-            <a:ext cx="5412486" cy="185812"/>
+            <a:ext cx="5412486" cy="190457"/>
           </a:xfrm>
           <a:prstGeom prst="rect">
             <a:avLst/>
@@ -7119,7 +7119,7 @@
           <a:p>
             <a:pPr algn="l">
               <a:lnSpc>
-                <a:spcPts val="1463"/>
+                <a:spcPts val="1499"/>
               </a:lnSpc>
               <a:spcBef>
                 <a:spcPts val="0"/>
@@ -7157,8 +7157,8 @@
         </p:nvSpPr>
         <p:spPr>
           <a:xfrm>
-            <a:off x="6313170" y="1319668"/>
-            <a:ext cx="5412486" cy="168920"/>
+            <a:off x="6313170" y="1324313"/>
+            <a:ext cx="5412486" cy="173143"/>
           </a:xfrm>
           <a:prstGeom prst="rect">
             <a:avLst/>
@@ -7173,7 +7173,7 @@
           <a:p>
             <a:pPr algn="l">
               <a:lnSpc>
-                <a:spcPts val="1330"/>
+                <a:spcPts val="1363"/>
               </a:lnSpc>
               <a:spcBef>
                 <a:spcPts val="0"/>
@@ -7247,8 +7247,8 @@
         </p:nvSpPr>
         <p:spPr>
           <a:xfrm>
-            <a:off x="6313170" y="1506876"/>
-            <a:ext cx="5412486" cy="168920"/>
+            <a:off x="6313170" y="1515744"/>
+            <a:ext cx="5412486" cy="173143"/>
           </a:xfrm>
           <a:prstGeom prst="rect">
             <a:avLst/>
@@ -7263,7 +7263,7 @@
           <a:p>
             <a:pPr algn="l">
               <a:lnSpc>
-                <a:spcPts val="1330"/>
+                <a:spcPts val="1363"/>
               </a:lnSpc>
               <a:spcBef>
                 <a:spcPts val="0"/>
@@ -7319,8 +7319,8 @@
         </p:nvSpPr>
         <p:spPr>
           <a:xfrm>
-            <a:off x="6313170" y="1694084"/>
-            <a:ext cx="5412486" cy="168920"/>
+            <a:off x="6313170" y="1707175"/>
+            <a:ext cx="5412486" cy="173143"/>
           </a:xfrm>
           <a:prstGeom prst="rect">
             <a:avLst/>
@@ -7335,7 +7335,7 @@
           <a:p>
             <a:pPr algn="l">
               <a:lnSpc>
-                <a:spcPts val="1330"/>
+                <a:spcPts val="1363"/>
               </a:lnSpc>
               <a:spcBef>
                 <a:spcPts val="0"/>
@@ -7391,8 +7391,8 @@
         </p:nvSpPr>
         <p:spPr>
           <a:xfrm>
-            <a:off x="704088" y="1949872"/>
-            <a:ext cx="5522214" cy="866308"/>
+            <a:off x="704088" y="1967186"/>
+            <a:ext cx="5522214" cy="883622"/>
           </a:xfrm>
           <a:prstGeom prst="rect">
             <a:avLst/>
@@ -7435,8 +7435,8 @@
         </p:nvSpPr>
         <p:spPr>
           <a:xfrm>
-            <a:off x="758952" y="2004736"/>
-            <a:ext cx="5412486" cy="185812"/>
+            <a:off x="758952" y="2022050"/>
+            <a:ext cx="5412486" cy="190457"/>
           </a:xfrm>
           <a:prstGeom prst="rect">
             <a:avLst/>
@@ -7451,7 +7451,7 @@
           <a:p>
             <a:pPr algn="l">
               <a:lnSpc>
-                <a:spcPts val="1463"/>
+                <a:spcPts val="1499"/>
               </a:lnSpc>
               <a:spcBef>
                 <a:spcPts val="0"/>
@@ -7498,8 +7498,8 @@
         </p:nvSpPr>
         <p:spPr>
           <a:xfrm>
-            <a:off x="758952" y="2217980"/>
-            <a:ext cx="5412486" cy="168920"/>
+            <a:off x="758952" y="2239939"/>
+            <a:ext cx="5412486" cy="173143"/>
           </a:xfrm>
           <a:prstGeom prst="rect">
             <a:avLst/>
@@ -7514,7 +7514,7 @@
           <a:p>
             <a:pPr algn="l">
               <a:lnSpc>
-                <a:spcPts val="1330"/>
+                <a:spcPts val="1363"/>
               </a:lnSpc>
               <a:spcBef>
                 <a:spcPts val="0"/>
@@ -7588,8 +7588,8 @@
         </p:nvSpPr>
         <p:spPr>
           <a:xfrm>
-            <a:off x="6258306" y="1949872"/>
-            <a:ext cx="5522214" cy="866308"/>
+            <a:off x="6258306" y="1967186"/>
+            <a:ext cx="5522214" cy="883622"/>
           </a:xfrm>
           <a:prstGeom prst="rect">
             <a:avLst/>
@@ -7632,8 +7632,8 @@
         </p:nvSpPr>
         <p:spPr>
           <a:xfrm>
-            <a:off x="6313170" y="2004736"/>
-            <a:ext cx="5412486" cy="185812"/>
+            <a:off x="6313170" y="2022050"/>
+            <a:ext cx="5412486" cy="190457"/>
           </a:xfrm>
           <a:prstGeom prst="rect">
             <a:avLst/>
@@ -7648,7 +7648,7 @@
           <a:p>
             <a:pPr algn="l">
               <a:lnSpc>
-                <a:spcPts val="1463"/>
+                <a:spcPts val="1499"/>
               </a:lnSpc>
               <a:spcBef>
                 <a:spcPts val="0"/>
@@ -7677,8 +7677,8 @@
         </p:nvSpPr>
         <p:spPr>
           <a:xfrm>
-            <a:off x="6313170" y="2217980"/>
-            <a:ext cx="5412486" cy="168920"/>
+            <a:off x="6313170" y="2239939"/>
+            <a:ext cx="5412486" cy="173143"/>
           </a:xfrm>
           <a:prstGeom prst="rect">
             <a:avLst/>
@@ -7693,7 +7693,7 @@
           <a:p>
             <a:pPr algn="l">
               <a:lnSpc>
-                <a:spcPts val="1330"/>
+                <a:spcPts val="1363"/>
               </a:lnSpc>
               <a:spcBef>
                 <a:spcPts val="0"/>
@@ -7749,8 +7749,8 @@
         </p:nvSpPr>
         <p:spPr>
           <a:xfrm>
-            <a:off x="6313170" y="2405188"/>
-            <a:ext cx="5412486" cy="168920"/>
+            <a:off x="6313170" y="2431370"/>
+            <a:ext cx="5412486" cy="173143"/>
           </a:xfrm>
           <a:prstGeom prst="rect">
             <a:avLst/>
@@ -7765,7 +7765,7 @@
           <a:p>
             <a:pPr algn="l">
               <a:lnSpc>
-                <a:spcPts val="1330"/>
+                <a:spcPts val="1363"/>
               </a:lnSpc>
               <a:spcBef>
                 <a:spcPts val="0"/>
@@ -7821,7 +7821,7 @@
         </p:nvCxnSpPr>
         <p:spPr>
           <a:xfrm>
-            <a:off x="704088" y="1933870"/>
+            <a:off x="704088" y="1951184"/>
             <a:ext cx="11076432" cy="0"/>
           </a:xfrm>
           <a:prstGeom prst="line">
@@ -7858,7 +7858,7 @@
         <p:spPr>
           <a:xfrm>
             <a:off x="6242304" y="1051560"/>
-            <a:ext cx="0" cy="1764620"/>
+            <a:ext cx="0" cy="1799248"/>
           </a:xfrm>
           <a:prstGeom prst="line">
             <a:avLst/>
@@ -7893,8 +7893,8 @@
         </p:nvSpPr>
         <p:spPr>
           <a:xfrm rot="16200000">
-            <a:off x="-324526" y="1787566"/>
-            <a:ext cx="1764620" cy="292608"/>
+            <a:off x="-341840" y="1804880"/>
+            <a:ext cx="1799248" cy="292608"/>
           </a:xfrm>
           <a:prstGeom prst="rect">
             <a:avLst/>
@@ -7909,7 +7909,7 @@
           <a:p>
             <a:pPr algn="ctr">
               <a:lnSpc>
-                <a:spcPts val="1330"/>
+                <a:spcPts val="1363"/>
               </a:lnSpc>
               <a:spcBef>
                 <a:spcPts val="0"/>
@@ -7956,7 +7956,7 @@
         </p:nvSpPr>
         <p:spPr>
           <a:xfrm>
-            <a:off x="704088" y="2848184"/>
+            <a:off x="704088" y="2882812"/>
             <a:ext cx="11076432" cy="274320"/>
           </a:xfrm>
           <a:prstGeom prst="rect">
@@ -7972,7 +7972,7 @@
           <a:p>
             <a:pPr algn="ctr">
               <a:lnSpc>
-                <a:spcPts val="1330"/>
+                <a:spcPts val="1363"/>
               </a:lnSpc>
               <a:spcBef>
                 <a:spcPts val="0"/>
@@ -8019,7 +8019,7 @@
         </p:nvSpPr>
         <p:spPr>
           <a:xfrm>
-            <a:off x="411480" y="3268808"/>
+            <a:off x="411480" y="3303436"/>
             <a:ext cx="11369040" cy="822960"/>
           </a:xfrm>
           <a:prstGeom prst="rect">
@@ -8065,7 +8065,7 @@
         </p:nvSpPr>
         <p:spPr>
           <a:xfrm>
-            <a:off x="502920" y="3268808"/>
+            <a:off x="502920" y="3303436"/>
             <a:ext cx="5556504" cy="822960"/>
           </a:xfrm>
           <a:prstGeom prst="rect">
@@ -8081,7 +8081,7 @@
           <a:p>
             <a:pPr algn="ctr">
               <a:lnSpc>
-                <a:spcPts val="1330"/>
+                <a:spcPts val="1363"/>
               </a:lnSpc>
               <a:spcBef>
                 <a:spcPts val="0"/>
@@ -8164,7 +8164,7 @@
         </p:nvSpPr>
         <p:spPr>
           <a:xfrm>
-            <a:off x="6132576" y="3268808"/>
+            <a:off x="6132576" y="3303436"/>
             <a:ext cx="5556504" cy="822960"/>
           </a:xfrm>
           <a:prstGeom prst="rect">
@@ -8180,7 +8180,7 @@
           <a:p>
             <a:pPr algn="ctr">
               <a:lnSpc>
-                <a:spcPts val="1330"/>
+                <a:spcPts val="1363"/>
               </a:lnSpc>
               <a:spcBef>
                 <a:spcPts val="0"/>
@@ -8245,7 +8245,7 @@
         </p:nvCxnSpPr>
         <p:spPr>
           <a:xfrm>
-            <a:off x="6096000" y="3314528"/>
+            <a:off x="6096000" y="3349156"/>
             <a:ext cx="0" cy="731520"/>
           </a:xfrm>
           <a:prstGeom prst="line">
